--- a/learning/P01_zephyr_make_project/slides/P005_Zephyr工程组织与驱动模型_Windows.pptx
+++ b/learning/P01_zephyr_make_project/slides/P005_Zephyr工程组织与驱动模型_Windows.pptx
@@ -916,26 +916,67 @@
           <a:lstStyle/>
           <a:p>
             <a:r>
+              <a:rPr/>
               <a:t>对应配套正文 6.3.2。</a:t>
             </a:r>
           </a:p>
           <a:p>
             <a:r>
-              <a:t>本章先构建 hello_world + mps2/an386，输出 p006/hello_world；后面换成自己的 component_hello 应用，板仍保持不变。</a:t>
-            </a:r>
-          </a:p>
-          <a:p>
-            <a:r>
+              <a:rPr>
+                <a:solidFill>
+                  <a:srgbClr val="29263B"/>
+                </a:solidFill>
+              </a:rPr>
+              <a:t xml:space="preserve">本章先构建 hello_world + </a:t>
+            </a:r>
+            <a:r>
+              <a:rPr>
+                <a:solidFill>
+                  <a:srgbClr val="0070C0"/>
+                </a:solidFill>
+              </a:rPr>
+              <a:t>mps2/an386</a:t>
+            </a:r>
+            <a:r>
+              <a:rPr>
+                <a:solidFill>
+                  <a:srgbClr val="29263B"/>
+                </a:solidFill>
+              </a:rPr>
+              <a:t xml:space="preserve">，输出 </a:t>
+            </a:r>
+            <a:r>
+              <a:rPr>
+                <a:solidFill>
+                  <a:srgbClr val="0070C0"/>
+                </a:solidFill>
+              </a:rPr>
+              <a:t>p006/hello_world</a:t>
+            </a:r>
+            <a:r>
+              <a:rPr>
+                <a:solidFill>
+                  <a:srgbClr val="29263B"/>
+                </a:solidFill>
+              </a:rPr>
+              <a:t>；P006 再换成自己的 component_hello 应用，板仍保持不变。</a:t>
+            </a:r>
+          </a:p>
+          <a:p>
+            <a:r>
+              <a:rPr/>
               <a:t>同板换应用时，应用路径与输出一起换成 component_hello；同应用换到 AN385 时，BOARD 与输出换成对应的新组合。</a:t>
             </a:r>
           </a:p>
           <a:p>
             <a:r>
+              <a:rPr/>
               <a:t>Zephyr 源码根、应用根、模块根和生成目录分别承担不同职责。不能把下载仓库根直接当成唯一应用，也不要混用旧 Build 缓存。</a:t>
             </a:r>
           </a:p>
           <a:p>
             <a:r>
+              <a:rPr/>
               <a:t>MD 6.3.2；同应用AN385组合只解释用法，本章不额外运行。</a:t>
             </a:r>
           </a:p>
@@ -4216,26 +4257,99 @@
           <a:lstStyle/>
           <a:p>
             <a:r>
+              <a:rPr/>
               <a:t>对应配套正文 6.2.2。</a:t>
             </a:r>
           </a:p>
           <a:p>
             <a:r>
-              <a:t>模块目录通过 zephyr/module.yml 等入口说明自己的名字、CMake 与 Kconfig 接入位置；构建必须先得到这个目录的真实路径。</a:t>
-            </a:r>
-          </a:p>
-          <a:p>
-            <a:r>
+              <a:rPr>
+                <a:solidFill>
+                  <a:srgbClr val="29263B"/>
+                </a:solidFill>
+              </a:rPr>
+              <a:t xml:space="preserve">模块先进入发现范围，再读取 </a:t>
+            </a:r>
+            <a:r>
+              <a:rPr>
+                <a:solidFill>
+                  <a:srgbClr val="0070C0"/>
+                </a:solidFill>
+              </a:rPr>
+              <a:t>module.yml</a:t>
+            </a:r>
+            <a:r>
+              <a:rPr>
+                <a:solidFill>
+                  <a:srgbClr val="29263B"/>
+                </a:solidFill>
+              </a:rPr>
+              <a:t xml:space="preserve">（当前源码也接受 </a:t>
+            </a:r>
+            <a:r>
+              <a:rPr>
+                <a:solidFill>
+                  <a:srgbClr val="0070C0"/>
+                </a:solidFill>
+              </a:rPr>
+              <a:t>module.yaml</a:t>
+            </a:r>
+            <a:r>
+              <a:rPr>
+                <a:solidFill>
+                  <a:srgbClr val="29263B"/>
+                </a:solidFill>
+              </a:rPr>
+              <a:t xml:space="preserve">）。无声明时，只有 </a:t>
+            </a:r>
+            <a:r>
+              <a:rPr>
+                <a:solidFill>
+                  <a:srgbClr val="0070C0"/>
+                </a:solidFill>
+              </a:rPr>
+              <a:t>zephyr/CMakeLists.txt</a:t>
+            </a:r>
+            <a:r>
+              <a:rPr>
+                <a:solidFill>
+                  <a:srgbClr val="29263B"/>
+                </a:solidFill>
+              </a:rPr>
+              <a:t xml:space="preserve"> 与 </a:t>
+            </a:r>
+            <a:r>
+              <a:rPr>
+                <a:solidFill>
+                  <a:srgbClr val="0070C0"/>
+                </a:solidFill>
+              </a:rPr>
+              <a:t>zephyr/Kconfig</a:t>
+            </a:r>
+            <a:r>
+              <a:rPr>
+                <a:solidFill>
+                  <a:srgbClr val="29263B"/>
+                </a:solidFill>
+              </a:rPr>
+              <a:t xml:space="preserve"> 同时存在才按旧式模块接入。</a:t>
+            </a:r>
+          </a:p>
+          <a:p>
+            <a:r>
+              <a:rPr/>
               <a:t>CMSIS_6 提供内核头，hal_xhsc 提供华大设备与外设源码，普通模块也可提供业务函数。模块机制相同，适用硬件与贡献内容不同。</a:t>
             </a:r>
           </a:p>
           <a:p>
             <a:r>
+              <a:rPr/>
               <a:t>west 管理仓库获取与版本。一个项目存在、被识别为模块、功能选中、源文件编译，是需要逐阶段确认的事情。</a:t>
             </a:r>
           </a:p>
           <a:p>
             <a:r>
+              <a:rPr/>
               <a:t>MD 6.2.2；https://docs.zephyrproject.org/latest/develop/modules.html</a:t>
             </a:r>
           </a:p>
@@ -27671,7 +27785,59 @@
               </a:defRPr>
             </a:pPr>
             <a:r>
-              <a:t>本章先构建 hello_world + mps2/an386，输出 p006/hello_world；后面换成自己的 component_hello 应用，板仍保持不变。</a:t>
+              <a:rPr sz="2100" b="0">
+                <a:solidFill>
+                  <a:srgbClr val="29263B"/>
+                </a:solidFill>
+                <a:latin typeface="Microsoft YaHei"/>
+                <a:ea typeface="Microsoft YaHei"/>
+                <a:cs typeface="Microsoft YaHei"/>
+              </a:rPr>
+              <a:t xml:space="preserve">本章先构建 hello_world + </a:t>
+            </a:r>
+            <a:r>
+              <a:rPr sz="2100" b="0">
+                <a:solidFill>
+                  <a:srgbClr val="0070C0"/>
+                </a:solidFill>
+                <a:latin typeface="Microsoft YaHei"/>
+                <a:ea typeface="Microsoft YaHei"/>
+                <a:cs typeface="Microsoft YaHei"/>
+              </a:rPr>
+              <a:t>mps2/an386</a:t>
+            </a:r>
+            <a:r>
+              <a:rPr sz="2100" b="0">
+                <a:solidFill>
+                  <a:srgbClr val="29263B"/>
+                </a:solidFill>
+                <a:latin typeface="Microsoft YaHei"/>
+                <a:ea typeface="Microsoft YaHei"/>
+                <a:cs typeface="Microsoft YaHei"/>
+              </a:rPr>
+              <a:t xml:space="preserve">，输出 </a:t>
+            </a:r>
+            <a:r>
+              <a:rPr sz="2100" b="0">
+                <a:solidFill>
+                  <a:srgbClr val="0070C0"/>
+                </a:solidFill>
+                <a:latin typeface="Microsoft YaHei"/>
+                <a:ea typeface="Microsoft YaHei"/>
+                <a:cs typeface="Microsoft YaHei"/>
+              </a:rPr>
+              <a:t>p006/hello_world</a:t>
+            </a:r>
+            <a:r>
+              <a:rPr sz="2100" b="0">
+                <a:solidFill>
+                  <a:srgbClr val="29263B"/>
+                </a:solidFill>
+                <a:latin typeface="Microsoft YaHei"/>
+                <a:ea typeface="Microsoft YaHei"/>
+                <a:cs typeface="Microsoft YaHei"/>
+              </a:rPr>
+              <a:t>；P006 再换成自己的 component_hello 应用，板仍保持不变。</a:t>
             </a:r>
           </a:p>
         </p:txBody>
@@ -48119,19 +48285,85 @@
               </a:defRPr>
             </a:pPr>
             <a:r>
-              <a:t>模块目录通过 </a:t>
-            </a:r>
-            <a:r>
               <a:rPr>
                 <a:solidFill>
+                  <a:srgbClr val="29263B"/>
+                </a:solidFill>
+                <a:ea typeface="Microsoft YaHei"/>
+              </a:rPr>
+              <a:t xml:space="preserve">模块先进入发现范围，再读取 </a:t>
+            </a:r>
+            <a:r>
+              <a:rPr>
+                <a:solidFill>
                   <a:srgbClr val="0070C0"/>
                 </a:solidFill>
                 <a:ea typeface="Microsoft YaHei"/>
               </a:rPr>
-              <a:t>zephyr/module.yml</a:t>
-            </a:r>
-            <a:r>
-              <a:t> 等入口说明自己的名字、CMake 与 Kconfig 接入位置；构建必须先得到这个目录的真实路径。</a:t>
+              <a:t>module.yml</a:t>
+            </a:r>
+            <a:r>
+              <a:rPr>
+                <a:solidFill>
+                  <a:srgbClr val="29263B"/>
+                </a:solidFill>
+                <a:ea typeface="Microsoft YaHei"/>
+              </a:rPr>
+              <a:t xml:space="preserve">（当前源码也接受 </a:t>
+            </a:r>
+            <a:r>
+              <a:rPr>
+                <a:solidFill>
+                  <a:srgbClr val="0070C0"/>
+                </a:solidFill>
+                <a:ea typeface="Microsoft YaHei"/>
+              </a:rPr>
+              <a:t>module.yaml</a:t>
+            </a:r>
+            <a:r>
+              <a:rPr>
+                <a:solidFill>
+                  <a:srgbClr val="29263B"/>
+                </a:solidFill>
+                <a:ea typeface="Microsoft YaHei"/>
+              </a:rPr>
+              <a:t xml:space="preserve">）。无声明时，只有 </a:t>
+            </a:r>
+            <a:r>
+              <a:rPr>
+                <a:solidFill>
+                  <a:srgbClr val="0070C0"/>
+                </a:solidFill>
+                <a:ea typeface="Microsoft YaHei"/>
+              </a:rPr>
+              <a:t>zephyr/CMakeLists.txt</a:t>
+            </a:r>
+            <a:r>
+              <a:rPr>
+                <a:solidFill>
+                  <a:srgbClr val="29263B"/>
+                </a:solidFill>
+                <a:ea typeface="Microsoft YaHei"/>
+              </a:rPr>
+              <a:t xml:space="preserve"> 与 </a:t>
+            </a:r>
+            <a:r>
+              <a:rPr>
+                <a:solidFill>
+                  <a:srgbClr val="0070C0"/>
+                </a:solidFill>
+                <a:ea typeface="Microsoft YaHei"/>
+              </a:rPr>
+              <a:t>zephyr/Kconfig</a:t>
+            </a:r>
+            <a:r>
+              <a:rPr>
+                <a:solidFill>
+                  <a:srgbClr val="29263B"/>
+                </a:solidFill>
+                <a:ea typeface="Microsoft YaHei"/>
+              </a:rPr>
+              <a:t xml:space="preserve"> 同时存在才按旧式模块接入。</a:t>
             </a:r>
           </a:p>
         </p:txBody>
